--- a/catalog/samples/numbered_imperatives.pptx
+++ b/catalog/samples/numbered_imperatives.pptx
@@ -1472,7 +1472,7 @@
           </a:p>
           <a:p>
             <a:r>
-              <a:t>  "template_sha256": "7438a1ad7af87da2659416d98c40021da20c8cc2645a0575a9a99d47350f8172"</a:t>
+              <a:t>  "template_sha256": "e0c2fcce3fba4f3658a112a3146105bec1d4f36b5f4352f4d89aeb2e44f1549a"</a:t>
             </a:r>
           </a:p>
           <a:p>
